--- a/templates/posts/october/01-10-2026-thu-li-boubacar-option-e-gold-roots.pptx
+++ b/templates/posts/october/01-10-2026-thu-li-boubacar-option-e-gold-roots.pptx
@@ -502,7 +502,7 @@
           <a:lstStyle/>
           <a:p>
             <a:r>
-              <a:t>Option E, gold roots (style of the SFW 'Welcome Eric Feiler' card). Fonts: Roboto and Times New Roman, as on that card. Cutout: assets/photo/boubacar/boubacar-portrait-cutout.png, his own photo with the background removed locally (rembg); nothing generated. Root network: assets/collage/root-network-gold.png, drawn by code. Call to action: his YouTube channel (his Instagram @tidia.diallo.1 is private). Sources: Impact story sheet, Boubacar Tidiane Diallo: https://docs.google.com/spreadsheets/d/10UHLwzJLBQAsmJqmg4hiCQRjBKXPAx7UnOudU-Vsg5U/edit; Email from Boubacar to Allison, 30 September 2026; Instagram: https://www.instagram.com/tidia.diallo.1/; YouTube: https://www.youtube.com/@boubacartidianediallo; Facebook: https://www.facebook.com/btidja; Photos: sent by Boubacar to Stephanie on WhatsApp, 17 August 2026, and to Allison, September 2026. [TAG @Stephanie] Send Boubacar the final caption and slides to approve before posting, and confirm he studied on a scholarship.</a:t>
+              <a:t>Option E, gold roots (style of the SFW 'Welcome Eric Feiler' card). Fonts: Roboto and Times New Roman, as on that card. Cutout: assets/photo/boubacar/boubacar-vegetable-beds-cutout.png, his own photo (vegetable beds) with the background removed locally (rembg); nothing generated. Root network: assets/collage/root-network-gold.png, drawn by code. Call to action: his YouTube channel (his Instagram @tidia.diallo.1 is private). Sources: Impact story sheet, Boubacar Tidiane Diallo: https://docs.google.com/spreadsheets/d/10UHLwzJLBQAsmJqmg4hiCQRjBKXPAx7UnOudU-Vsg5U/edit; Email from Boubacar to Allison, 30 September 2026; Instagram: https://www.instagram.com/tidia.diallo.1/; YouTube: https://www.youtube.com/@boubacartidianediallo; Facebook: https://www.facebook.com/btidja; Photos: sent by Boubacar to Stephanie on WhatsApp, 17 August 2026, and to Allison, September 2026. [TAG @Stephanie] Send Boubacar the final caption and slides to approve before posting, and confirm he studied on a scholarship.</a:t>
             </a:r>
           </a:p>
         </p:txBody>
@@ -3632,7 +3632,7 @@
       </p:sp>
       <p:pic>
         <p:nvPicPr>
-          <p:cNvPr id="5" name="Picture 4" descr="boubacar-portrait-cutout-glow.png"/>
+          <p:cNvPr id="5" name="Picture 4" descr="boubacar-vegetable-beds-cutout-glow.png"/>
           <p:cNvPicPr>
             <a:picLocks noChangeAspect="1"/>
           </p:cNvPicPr>
@@ -3646,8 +3646,8 @@
         </p:blipFill>
         <p:spPr>
           <a:xfrm>
-            <a:off x="6362575" y="-175905"/>
-            <a:ext cx="5624330" cy="11972311"/>
+            <a:off x="6650491" y="-179614"/>
+            <a:ext cx="4520973" cy="9388928"/>
           </a:xfrm>
           <a:prstGeom prst="rect">
             <a:avLst/>
@@ -3656,7 +3656,7 @@
       </p:pic>
       <p:pic>
         <p:nvPicPr>
-          <p:cNvPr id="6" name="Picture 5" descr="boubacar-portrait-cutout.png"/>
+          <p:cNvPr id="6" name="Picture 5" descr="boubacar-vegetable-beds-cutout.png"/>
           <p:cNvPicPr>
             <a:picLocks noChangeAspect="1"/>
           </p:cNvPicPr>
@@ -3670,8 +3670,8 @@
         </p:blipFill>
         <p:spPr>
           <a:xfrm>
-            <a:off x="6728981" y="190500"/>
-            <a:ext cx="4891518" cy="11239500"/>
+            <a:off x="7058705" y="228600"/>
+            <a:ext cx="3704544" cy="8572500"/>
           </a:xfrm>
           <a:prstGeom prst="rect">
             <a:avLst/>

--- a/templates/posts/october/01-10-2026-thu-li-boubacar-option-e-gold-roots.pptx
+++ b/templates/posts/october/01-10-2026-thu-li-boubacar-option-e-gold-roots.pptx
@@ -502,7 +502,7 @@
           <a:lstStyle/>
           <a:p>
             <a:r>
-              <a:t>Option E, gold roots (style of the SFW 'Welcome Eric Feiler' card). Fonts: Roboto and Times New Roman, as on that card. Cutout: assets/photo/boubacar/boubacar-vegetable-beds-cutout.png, his own photo (vegetable beds) with the background removed locally (rembg); nothing generated. Root network: assets/collage/root-network-gold.png, drawn by code. Call to action: his YouTube channel (his Instagram @tidia.diallo.1 is private). Sources: Impact story sheet, Boubacar Tidiane Diallo: https://docs.google.com/spreadsheets/d/10UHLwzJLBQAsmJqmg4hiCQRjBKXPAx7UnOudU-Vsg5U/edit; Email from Boubacar to Allison, 30 September 2026; Instagram: https://www.instagram.com/tidia.diallo.1/; YouTube: https://www.youtube.com/@boubacartidianediallo; Facebook: https://www.facebook.com/btidja; Photos: sent by Boubacar to Stephanie on WhatsApp, 17 August 2026, and to Allison, September 2026. [TAG @Stephanie] Send Boubacar the final caption and slides to approve before posting, and confirm he studied on a scholarship.</a:t>
+              <a:t>Option E, gold roots (style of the SFW 'Welcome Eric Feiler' card). Fonts: Roboto and Times New Roman, as on that card. Photo: assets/photo/boubacar/boubacar-portrait-bananas.jpg in an arch frame. Root network: assets/collage/root-network-gold.png, drawn by code. Call to action: his YouTube channel (his Instagram @tidia.diallo.1 is private). Sources: Impact story sheet, Boubacar Tidiane Diallo: https://docs.google.com/spreadsheets/d/10UHLwzJLBQAsmJqmg4hiCQRjBKXPAx7UnOudU-Vsg5U/edit; Email from Boubacar to Allison, 30 September 2026; Instagram: https://www.instagram.com/tidia.diallo.1/; YouTube: https://www.youtube.com/@boubacartidianediallo; Facebook: https://www.facebook.com/btidja; Photos: sent by Boubacar to Stephanie on WhatsApp, 17 August 2026, and to Allison, September 2026. [TAG @Stephanie] Send Boubacar the final caption and slides to approve before posting, and confirm he studied on a scholarship.</a:t>
             </a:r>
           </a:p>
         </p:txBody>
@@ -3630,9 +3630,62 @@
           </a:p>
         </p:txBody>
       </p:sp>
+      <p:sp>
+        <p:nvSpPr>
+          <p:cNvPr id="5" name="Round Same Side Corner Rectangle 4"/>
+          <p:cNvSpPr/>
+          <p:nvPr/>
+        </p:nvSpPr>
+        <p:spPr>
+          <a:xfrm>
+            <a:off x="7791450" y="266700"/>
+            <a:ext cx="3371850" cy="5562600"/>
+          </a:xfrm>
+          <a:prstGeom prst="round2SameRect">
+            <a:avLst>
+              <a:gd name="adj1" fmla="val 50000"/>
+              <a:gd name="adj2" fmla="val 0"/>
+            </a:avLst>
+          </a:prstGeom>
+          <a:solidFill>
+            <a:srgbClr val="F6E3C2"/>
+          </a:solidFill>
+          <a:ln>
+            <a:noFill/>
+          </a:ln>
+          <a:effectLst>
+            <a:outerShdw blurRad="228600" dist="76200" dir="5400000" algn="t" rotWithShape="0">
+              <a:srgbClr val="000000">
+                <a:alpha val="30000"/>
+              </a:srgbClr>
+            </a:outerShdw>
+          </a:effectLst>
+        </p:spPr>
+        <p:style>
+          <a:lnRef idx="1">
+            <a:schemeClr val="accent1"/>
+          </a:lnRef>
+          <a:fillRef idx="3">
+            <a:schemeClr val="accent1"/>
+          </a:fillRef>
+          <a:effectRef idx="2">
+            <a:schemeClr val="accent1"/>
+          </a:effectRef>
+          <a:fontRef idx="minor">
+            <a:schemeClr val="lt1"/>
+          </a:fontRef>
+        </p:style>
+        <p:txBody>
+          <a:bodyPr rtlCol="0" anchor="ctr"/>
+          <a:lstStyle/>
+          <a:p>
+            <a:pPr algn="ctr"/>
+          </a:p>
+        </p:txBody>
+      </p:sp>
       <p:pic>
         <p:nvPicPr>
-          <p:cNvPr id="5" name="Picture 4" descr="boubacar-vegetable-beds-cutout-glow.png"/>
+          <p:cNvPr id="6" name="Picture 5" descr="6433006920926265521.jpg"/>
           <p:cNvPicPr>
             <a:picLocks noChangeAspect="1"/>
           </p:cNvPicPr>
@@ -3646,35 +3699,13 @@
         </p:blipFill>
         <p:spPr>
           <a:xfrm>
-            <a:off x="6650491" y="-179614"/>
-            <a:ext cx="4520973" cy="9388928"/>
+            <a:off x="7905750" y="381000"/>
+            <a:ext cx="3143250" cy="5334000"/>
           </a:xfrm>
-          <a:prstGeom prst="rect">
-            <a:avLst/>
-          </a:prstGeom>
-        </p:spPr>
-      </p:pic>
-      <p:pic>
-        <p:nvPicPr>
-          <p:cNvPr id="6" name="Picture 5" descr="boubacar-vegetable-beds-cutout.png"/>
-          <p:cNvPicPr>
-            <a:picLocks noChangeAspect="1"/>
-          </p:cNvPicPr>
-          <p:nvPr/>
-        </p:nvPicPr>
-        <p:blipFill>
-          <a:blip r:embed="rId5"/>
-          <a:stretch>
-            <a:fillRect/>
-          </a:stretch>
-        </p:blipFill>
-        <p:spPr>
-          <a:xfrm>
-            <a:off x="7058705" y="228600"/>
-            <a:ext cx="3704544" cy="8572500"/>
-          </a:xfrm>
-          <a:prstGeom prst="rect">
-            <a:avLst/>
+          <a:prstGeom prst="round2SameRect">
+            <a:avLst>
+              <a:gd name="adj1" fmla="val 50000"/>
+            </a:avLst>
           </a:prstGeom>
         </p:spPr>
       </p:pic>
@@ -3687,7 +3718,7 @@
           <p:nvPr/>
         </p:nvPicPr>
         <p:blipFill>
-          <a:blip r:embed="rId6"/>
+          <a:blip r:embed="rId5"/>
           <a:stretch>
             <a:fillRect/>
           </a:stretch>

--- a/templates/posts/october/01-10-2026-thu-li-boubacar-option-e-gold-roots.pptx
+++ b/templates/posts/october/01-10-2026-thu-li-boubacar-option-e-gold-roots.pptx
@@ -3685,7 +3685,7 @@
       </p:sp>
       <p:pic>
         <p:nvPicPr>
-          <p:cNvPr id="6" name="Picture 5" descr="6433006920926265521.jpg"/>
+          <p:cNvPr id="6" name="Picture 5" descr="3863734254881739869.jpg"/>
           <p:cNvPicPr>
             <a:picLocks noChangeAspect="1"/>
           </p:cNvPicPr>

--- a/templates/posts/october/01-10-2026-thu-li-boubacar-option-e-gold-roots.pptx
+++ b/templates/posts/october/01-10-2026-thu-li-boubacar-option-e-gold-roots.pptx
@@ -502,7 +502,7 @@
           <a:lstStyle/>
           <a:p>
             <a:r>
-              <a:t>Option E, gold roots (style of the SFW 'Welcome Eric Feiler' card). Fonts: Roboto and Times New Roman, as on that card. Photo: assets/photo/boubacar/boubacar-portrait-bananas.jpg in an arch frame. Root network: assets/collage/root-network-gold.png, drawn by code. Call to action: his YouTube channel (his Instagram @tidia.diallo.1 is private). Sources: Impact story sheet, Boubacar Tidiane Diallo: https://docs.google.com/spreadsheets/d/10UHLwzJLBQAsmJqmg4hiCQRjBKXPAx7UnOudU-Vsg5U/edit; Email from Boubacar to Allison, 30 September 2026; Instagram: https://www.instagram.com/tidia.diallo.1/; YouTube: https://www.youtube.com/@boubacartidianediallo; Facebook: https://www.facebook.com/btidja; Photos: sent by Boubacar to Stephanie on WhatsApp, 17 August 2026, and to Allison, September 2026. [TAG @Stephanie] Send Boubacar the final caption and slides to approve before posting, and confirm he studied on a scholarship.</a:t>
+              <a:t>Option E, gold roots (style of the SFW 'Welcome Eric Feiler' card). Fonts: Montserrat and EB Garamond (brand). Photo: assets/photo/boubacar/boubacar-portrait-bananas.jpg in an arch frame. Root network: assets/collage/root-network-gold.png, drawn by code. Call to action: his YouTube channel (his Instagram @tidia.diallo.1 is private). Sources: Impact story sheet, Boubacar Tidiane Diallo: https://docs.google.com/spreadsheets/d/10UHLwzJLBQAsmJqmg4hiCQRjBKXPAx7UnOudU-Vsg5U/edit; Email from Boubacar to Allison, 30 September 2026; Instagram: https://www.instagram.com/tidia.diallo.1/; YouTube: https://www.youtube.com/@boubacartidianediallo; Facebook: https://www.facebook.com/btidja; Photos: sent by Boubacar to Stephanie on WhatsApp, 17 August 2026, and to Allison, September 2026. [TAG @Stephanie] Send Boubacar the final caption and slides to approve before posting, and confirm he studied on a scholarship.</a:t>
             </a:r>
           </a:p>
         </p:txBody>
@@ -3685,7 +3685,7 @@
       </p:sp>
       <p:pic>
         <p:nvPicPr>
-          <p:cNvPr id="6" name="Picture 5" descr="3863734254881739869.jpg"/>
+          <p:cNvPr id="6" name="Picture 5" descr="8840858513894694492.jpg"/>
           <p:cNvPicPr>
             <a:picLocks noChangeAspect="1"/>
           </p:cNvPicPr>
@@ -3809,7 +3809,7 @@
                 <a:solidFill>
                   <a:srgbClr val="1E1412"/>
                 </a:solidFill>
-                <a:latin typeface="Roboto"/>
+                <a:latin typeface="Montserrat"/>
               </a:rPr>
               <a:t>Happy International Coffee Day</a:t>
             </a:r>
@@ -3844,11 +3844,11 @@
               </a:lnSpc>
             </a:pPr>
             <a:r>
-              <a:rPr sz="5800" b="0" i="0">
+              <a:rPr sz="5200" b="0" i="0">
                 <a:solidFill>
                   <a:srgbClr val="1E1412"/>
                 </a:solidFill>
-                <a:latin typeface="Roboto"/>
+                <a:latin typeface="Montserrat"/>
               </a:rPr>
               <a:t>Boubacar Tidiane</a:t>
             </a:r>
@@ -3860,11 +3860,11 @@
               </a:lnSpc>
             </a:pPr>
             <a:r>
-              <a:rPr sz="5800" b="0" i="0">
+              <a:rPr sz="5200" b="0" i="0">
                 <a:solidFill>
                   <a:srgbClr val="1E1412"/>
                 </a:solidFill>
-                <a:latin typeface="Roboto"/>
+                <a:latin typeface="Montserrat"/>
               </a:rPr>
               <a:t>Diallo</a:t>
             </a:r>
@@ -3903,7 +3903,7 @@
                 <a:solidFill>
                   <a:srgbClr val="1E1412"/>
                 </a:solidFill>
-                <a:latin typeface="Times New Roman"/>
+                <a:latin typeface="EB Garamond"/>
               </a:rPr>
               <a:t>Gnaly Coffee &amp; AgroÉcole Bio</a:t>
             </a:r>
@@ -3919,7 +3919,7 @@
                 <a:solidFill>
                   <a:srgbClr val="1E1412"/>
                 </a:solidFill>
-                <a:latin typeface="Times New Roman"/>
+                <a:latin typeface="EB Garamond"/>
               </a:rPr>
               <a:t>Fouta Djallon, Guinea-Conakry</a:t>
             </a:r>
